--- a/assets/pptx/catalog-309.pptx
+++ b/assets/pptx/catalog-309.pptx
@@ -3266,7 +3266,7 @@
                 <a:ea typeface="Ebrima"/>
                 <a:cs typeface="Ebrima"/>
               </a:rPr>
-              <a:t>ክብር ላላወቀውም ክብር ላሳየከው (2x)</a:t>
+              <a:t>ክብር ላላወቀውም ክብር ላሳየከው 2x</a:t>
             </a:r>
           </a:p>
           <a:p>
@@ -3284,7 +3284,7 @@
                 <a:ea typeface="Ebrima"/>
                 <a:cs typeface="Ebrima"/>
               </a:rPr>
-              <a:t>አምልኮ አለኝ አምልኮ (2x)</a:t>
+              <a:t>አምልኮ አለኝ አምልኮ 2x</a:t>
             </a:r>
           </a:p>
           <a:p>
@@ -3302,7 +3302,7 @@
                 <a:ea typeface="Ebrima"/>
                 <a:cs typeface="Ebrima"/>
               </a:rPr>
-              <a:t>ዝማሬ አለኝ ዝማሬ (2x)</a:t>
+              <a:t>ዝማሬ አለኝ ዝማሬ 2x</a:t>
             </a:r>
           </a:p>
         </p:txBody>
@@ -3387,7 +3387,7 @@
                 <a:ea typeface="Ebrima"/>
                 <a:cs typeface="Ebrima"/>
               </a:rPr>
-              <a:t>ክብር አለኝ ስግደት አለኝ (2x)</a:t>
+              <a:t>ክብር አለኝ ስግደት አለኝ 2x</a:t>
             </a:r>
           </a:p>
           <a:p>
@@ -3405,7 +3405,7 @@
                 <a:ea typeface="Ebrima"/>
                 <a:cs typeface="Ebrima"/>
               </a:rPr>
-              <a:t>አምልኮ አለኝ አምልኮ (2x)</a:t>
+              <a:t>አምልኮ አለኝ አምልኮ 2x</a:t>
             </a:r>
           </a:p>
           <a:p>
@@ -3423,7 +3423,7 @@
                 <a:ea typeface="Ebrima"/>
                 <a:cs typeface="Ebrima"/>
               </a:rPr>
-              <a:t>ዝማሬ አለኝ ዝማሬ (2x)</a:t>
+              <a:t>ዝማሬ አለኝ ዝማሬ 2x</a:t>
             </a:r>
           </a:p>
         </p:txBody>
@@ -3629,7 +3629,7 @@
                 <a:ea typeface="Ebrima"/>
                 <a:cs typeface="Ebrima"/>
               </a:rPr>
-              <a:t>በዝማሬ እስቲ ላክብረው (2x)</a:t>
+              <a:t>በዝማሬ እስቲ ላክብረው 2x</a:t>
             </a:r>
           </a:p>
         </p:txBody>
@@ -3714,7 +3714,7 @@
                 <a:ea typeface="Ebrima"/>
                 <a:cs typeface="Ebrima"/>
               </a:rPr>
-              <a:t>በሽብሸባ እስቲ ላክብረው (2x)</a:t>
+              <a:t>በሽብሸባ እስቲ ላክብረው 2x</a:t>
             </a:r>
           </a:p>
         </p:txBody>
@@ -3799,7 +3799,7 @@
                 <a:ea typeface="Ebrima"/>
                 <a:cs typeface="Ebrima"/>
               </a:rPr>
-              <a:t>ክብር ላላወቀውም ክብር ላሳየከው (2x)</a:t>
+              <a:t>ክብር ላላወቀውም ክብር ላሳየከው 2x</a:t>
             </a:r>
           </a:p>
           <a:p>
@@ -3817,7 +3817,7 @@
                 <a:ea typeface="Ebrima"/>
                 <a:cs typeface="Ebrima"/>
               </a:rPr>
-              <a:t>አምልኮ አለኝ አምልኮ (2x)</a:t>
+              <a:t>አምልኮ አለኝ አምልኮ 2x</a:t>
             </a:r>
           </a:p>
           <a:p>
@@ -3835,7 +3835,7 @@
                 <a:ea typeface="Ebrima"/>
                 <a:cs typeface="Ebrima"/>
               </a:rPr>
-              <a:t>ዝማሬ አለኝ ዝማሬ (2x)</a:t>
+              <a:t>ዝማሬ አለኝ ዝማሬ 2x</a:t>
             </a:r>
           </a:p>
         </p:txBody>
@@ -4041,7 +4041,7 @@
                 <a:ea typeface="Ebrima"/>
                 <a:cs typeface="Ebrima"/>
               </a:rPr>
-              <a:t>ክብር አለኝ ስግደት አለኝ (2x)</a:t>
+              <a:t>ክብር አለኝ ስግደት አለኝ 2x</a:t>
             </a:r>
           </a:p>
           <a:p>
@@ -4059,7 +4059,7 @@
                 <a:ea typeface="Ebrima"/>
                 <a:cs typeface="Ebrima"/>
               </a:rPr>
-              <a:t>አምልኮ አለኝ አምልኮ (2x)</a:t>
+              <a:t>አምልኮ አለኝ አምልኮ 2x</a:t>
             </a:r>
           </a:p>
           <a:p>
@@ -4077,7 +4077,7 @@
                 <a:ea typeface="Ebrima"/>
                 <a:cs typeface="Ebrima"/>
               </a:rPr>
-              <a:t>ዝማሬ አለኝ ዝማሬ (2x)</a:t>
+              <a:t>ዝማሬ አለኝ ዝማሬ 2x</a:t>
             </a:r>
           </a:p>
         </p:txBody>
